--- a/labs/080-windows-batch-files/assets/Windows Batch Files SUBMISSION TEMPLATE.pptx
+++ b/labs/080-windows-batch-files/assets/Windows Batch Files SUBMISSION TEMPLATE.pptx
@@ -7057,7 +7057,8 @@
           <a:lstStyle/>
           <a:p>
             <a:r>
-              <a:t>Screenshot 9</a:t>
+              <a:rPr sz="2000"/>
+              <a:t>Screenshot 9 Output of all the groups and act5c.bat in the Users directory.</a:t>
             </a:r>
           </a:p>
         </p:txBody>
@@ -7076,11 +7077,7 @@
         <p:txBody>
           <a:bodyPr/>
           <a:lstStyle/>
-          <a:p>
-            <a:r>
-              <a:t>Output of all the groups and act5c.bat in the Users directory.</a:t>
-            </a:r>
-          </a:p>
+          <a:p/>
         </p:txBody>
       </p:sp>
     </p:spTree>
@@ -7132,7 +7129,8 @@
           <a:lstStyle/>
           <a:p>
             <a:r>
-              <a:t>Screenshot 1</a:t>
+              <a:rPr sz="2000"/>
+              <a:t>Screenshot 1 Command prompt window and Calculator running from the symbolic link.</a:t>
             </a:r>
           </a:p>
         </p:txBody>
@@ -7159,11 +7157,7 @@
             <a:normAutofit/>
           </a:bodyPr>
           <a:lstStyle/>
-          <a:p>
-            <a:r>
-              <a:t>Command Prompt window and Calculator running from the symbolic link.</a:t>
-            </a:r>
-          </a:p>
+          <a:p/>
         </p:txBody>
       </p:sp>
     </p:spTree>
@@ -7215,7 +7209,8 @@
           <a:lstStyle/>
           <a:p>
             <a:r>
-              <a:t>Screenshot 2</a:t>
+              <a:rPr sz="1800"/>
+              <a:t>Screenshot 2 Task Manager, command window, and Felix launched from the renamed calc.exe link.</a:t>
             </a:r>
           </a:p>
         </p:txBody>
@@ -7242,11 +7237,7 @@
             <a:normAutofit/>
           </a:bodyPr>
           <a:lstStyle/>
-          <a:p>
-            <a:r>
-              <a:t>Task Manager, command window, and Felix launched from the renamed calc.exe link.</a:t>
-            </a:r>
-          </a:p>
+          <a:p/>
         </p:txBody>
       </p:sp>
     </p:spTree>
@@ -7298,7 +7289,8 @@
           <a:lstStyle/>
           <a:p>
             <a:r>
-              <a:t>Screenshot 3</a:t>
+              <a:rPr sz="2000"/>
+              <a:t>Screenshot 3 Task Manager, command window, and Felix launched through the hard link.</a:t>
             </a:r>
           </a:p>
         </p:txBody>
@@ -7325,11 +7317,7 @@
             <a:normAutofit/>
           </a:bodyPr>
           <a:lstStyle/>
-          <a:p>
-            <a:r>
-              <a:t>Task Manager, command window, and Felix launched through the hard link.</a:t>
-            </a:r>
-          </a:p>
+          <a:p/>
         </p:txBody>
       </p:sp>
     </p:spTree>
@@ -7381,7 +7369,8 @@
           <a:lstStyle/>
           <a:p>
             <a:r>
-              <a:t>Screenshot 4</a:t>
+              <a:rPr sz="2200"/>
+              <a:t>Screenshot 4 First page output showing the tools directory link.</a:t>
             </a:r>
           </a:p>
         </p:txBody>
@@ -7408,11 +7397,7 @@
             <a:normAutofit/>
           </a:bodyPr>
           <a:lstStyle/>
-          <a:p>
-            <a:r>
-              <a:t>First page output showing the tools directory link.</a:t>
-            </a:r>
-          </a:p>
+          <a:p/>
         </p:txBody>
       </p:sp>
     </p:spTree>
@@ -7464,7 +7449,8 @@
           <a:lstStyle/>
           <a:p>
             <a:r>
-              <a:t>Screenshot 5</a:t>
+              <a:rPr sz="2200"/>
+              <a:t>Screenshot 5 Output from the for-loop command.</a:t>
             </a:r>
           </a:p>
         </p:txBody>
@@ -7491,11 +7477,7 @@
             <a:normAutofit/>
           </a:bodyPr>
           <a:lstStyle/>
-          <a:p>
-            <a:r>
-              <a:t>Output from the for-loop command.</a:t>
-            </a:r>
-          </a:p>
+          <a:p/>
         </p:txBody>
       </p:sp>
     </p:spTree>
@@ -7547,7 +7529,8 @@
           <a:lstStyle/>
           <a:p>
             <a:r>
-              <a:t>Screenshot 6</a:t>
+              <a:rPr sz="2200"/>
+              <a:t>Screenshot 6 files1 directory contents after the copy exercise.</a:t>
             </a:r>
           </a:p>
         </p:txBody>
@@ -7574,11 +7557,7 @@
             <a:normAutofit/>
           </a:bodyPr>
           <a:lstStyle/>
-          <a:p>
-            <a:r>
-              <a:t>files1 directory contents after the copy exercise.</a:t>
-            </a:r>
-          </a:p>
+          <a:p/>
         </p:txBody>
       </p:sp>
     </p:spTree>
@@ -7630,7 +7609,8 @@
           <a:lstStyle/>
           <a:p>
             <a:r>
-              <a:t>Screenshot 7</a:t>
+              <a:rPr sz="2000"/>
+              <a:t>Screenshot 7 Batch file output from act5.bat. No errors required for a grade.</a:t>
             </a:r>
           </a:p>
         </p:txBody>
@@ -7657,11 +7637,7 @@
             <a:normAutofit/>
           </a:bodyPr>
           <a:lstStyle/>
-          <a:p>
-            <a:r>
-              <a:t>Batch file output from act5.bat. No errors required for a grade.</a:t>
-            </a:r>
-          </a:p>
+          <a:p/>
         </p:txBody>
       </p:sp>
     </p:spTree>
@@ -7713,7 +7689,8 @@
           <a:lstStyle/>
           <a:p>
             <a:r>
-              <a:t>Screenshot 8</a:t>
+              <a:rPr sz="2200"/>
+              <a:t>Screenshot 8 Output from act5b.bat pinging the two hosts.</a:t>
             </a:r>
           </a:p>
         </p:txBody>
@@ -7740,11 +7717,7 @@
             <a:normAutofit/>
           </a:bodyPr>
           <a:lstStyle/>
-          <a:p>
-            <a:r>
-              <a:t>Output from act5b.bat pinging the two hosts.</a:t>
-            </a:r>
-          </a:p>
+          <a:p/>
         </p:txBody>
       </p:sp>
     </p:spTree>
